--- a/generated/Tier 1 Broker Scorecards/Insure Me Now Agency, LLC_Broker_Scorecard.pptx
+++ b/generated/Tier 1 Broker Scorecards/Insure Me Now Agency, LLC_Broker_Scorecard.pptx
@@ -3690,7 +3690,7 @@
                         <a:rPr sz="900">
                           <a:latin typeface="Segoe UI"/>
                         </a:rPr>
-                        <a:t>Fleet Bound Premium: $407,802.24</a:t>
+                        <a:t>Fleet Bound Premium: $408,653.29</a:t>
                       </a:r>
                     </a:p>
                   </a:txBody>
@@ -3727,7 +3727,7 @@
                         <a:rPr sz="900">
                           <a:latin typeface="Segoe UI"/>
                         </a:rPr>
-                        <a:t>Fleet Book %: 51.1%</a:t>
+                        <a:t>Fleet Book %: 51.2%</a:t>
                       </a:r>
                     </a:p>
                   </a:txBody>
@@ -3803,7 +3803,7 @@
                         <a:rPr sz="900">
                           <a:latin typeface="Segoe UI"/>
                         </a:rPr>
-                        <a:t>Non-Fleet Bound Premium: $390,907.59</a:t>
+                        <a:t>Non-Fleet Bound Premium: $390,056.54</a:t>
                       </a:r>
                     </a:p>
                   </a:txBody>
@@ -3840,7 +3840,7 @@
                         <a:rPr sz="900">
                           <a:latin typeface="Segoe UI"/>
                         </a:rPr>
-                        <a:t>Non-Fleet Book %: 48.9%</a:t>
+                        <a:t>Non-Fleet Book %: 48.8%</a:t>
                       </a:r>
                     </a:p>
                   </a:txBody>
@@ -4428,7 +4428,7 @@
                           </a:solidFill>
                           <a:latin typeface="Segoe UI"/>
                         </a:rPr>
-                        <a:t>31</a:t>
+                        <a:t>32</a:t>
                       </a:r>
                     </a:p>
                   </a:txBody>
@@ -4707,7 +4707,7 @@
                           </a:solidFill>
                           <a:latin typeface="Segoe UI"/>
                         </a:rPr>
-                        <a:t>25.8%</a:t>
+                        <a:t>25.0%</a:t>
                       </a:r>
                     </a:p>
                   </a:txBody>

--- a/generated/Tier 1 Broker Scorecards/Insure Me Now Agency, LLC_Broker_Scorecard.pptx
+++ b/generated/Tier 1 Broker Scorecards/Insure Me Now Agency, LLC_Broker_Scorecard.pptx
@@ -3394,7 +3394,7 @@
                         <a:rPr sz="900">
                           <a:latin typeface="Segoe UI"/>
                         </a:rPr>
-                        <a:t>Tier 1  |  28.00% / 15.00%</a:t>
+                        <a:t>Tier 1  |  27.45% / 15.00%</a:t>
                       </a:r>
                     </a:p>
                   </a:txBody>
@@ -3690,7 +3690,7 @@
                         <a:rPr sz="900">
                           <a:latin typeface="Segoe UI"/>
                         </a:rPr>
-                        <a:t>Fleet Bound Premium: $408,653.29</a:t>
+                        <a:t>Fleet Bound Premium: $413,685.61</a:t>
                       </a:r>
                     </a:p>
                   </a:txBody>
@@ -3727,7 +3727,7 @@
                         <a:rPr sz="900">
                           <a:latin typeface="Segoe UI"/>
                         </a:rPr>
-                        <a:t>Fleet Book %: 51.2%</a:t>
+                        <a:t>Fleet Book %: 51.8%</a:t>
                       </a:r>
                     </a:p>
                   </a:txBody>
@@ -3766,7 +3766,7 @@
                         <a:rPr sz="900">
                           <a:latin typeface="Segoe UI"/>
                         </a:rPr>
-                        <a:t>Non-Fleet Subs: 126  |  Binds: 28</a:t>
+                        <a:t>Non-Fleet Subs: 129  |  Binds: 28</a:t>
                       </a:r>
                     </a:p>
                   </a:txBody>
@@ -3803,7 +3803,7 @@
                         <a:rPr sz="900">
                           <a:latin typeface="Segoe UI"/>
                         </a:rPr>
-                        <a:t>Non-Fleet Bound Premium: $390,056.54</a:t>
+                        <a:t>Non-Fleet Bound Premium: $385,024.22</a:t>
                       </a:r>
                     </a:p>
                   </a:txBody>
@@ -3840,7 +3840,7 @@
                         <a:rPr sz="900">
                           <a:latin typeface="Segoe UI"/>
                         </a:rPr>
-                        <a:t>Non-Fleet Book %: 48.8%</a:t>
+                        <a:t>Non-Fleet Book %: 48.2%</a:t>
                       </a:r>
                     </a:p>
                   </a:txBody>
@@ -4428,7 +4428,7 @@
                           </a:solidFill>
                           <a:latin typeface="Segoe UI"/>
                         </a:rPr>
-                        <a:t>32</a:t>
+                        <a:t>35</a:t>
                       </a:r>
                     </a:p>
                   </a:txBody>
@@ -4707,7 +4707,7 @@
                           </a:solidFill>
                           <a:latin typeface="Segoe UI"/>
                         </a:rPr>
-                        <a:t>25.0%</a:t>
+                        <a:t>22.9%</a:t>
                       </a:r>
                     </a:p>
                   </a:txBody>

--- a/generated/Tier 1 Broker Scorecards/Insure Me Now Agency, LLC_Broker_Scorecard.pptx
+++ b/generated/Tier 1 Broker Scorecards/Insure Me Now Agency, LLC_Broker_Scorecard.pptx
@@ -3357,7 +3357,7 @@
                         <a:rPr sz="800">
                           <a:latin typeface="Segoe UI"/>
                         </a:rPr>
-                        <a:t>$1,109,944.96 / $1,808,408.21 / $798,709.83</a:t>
+                        <a:t>$1,109,944.96 / $1,820,183.36 / $810,484.98</a:t>
                       </a:r>
                     </a:p>
                   </a:txBody>
@@ -3394,7 +3394,7 @@
                         <a:rPr sz="900">
                           <a:latin typeface="Segoe UI"/>
                         </a:rPr>
-                        <a:t>Tier 1  |  27.45% / 15.00%</a:t>
+                        <a:t>Tier 1  |  28.10% / 15.00%</a:t>
                       </a:r>
                     </a:p>
                   </a:txBody>
@@ -3431,7 +3431,7 @@
                         <a:rPr sz="900">
                           <a:latin typeface="Segoe UI"/>
                         </a:rPr>
-                        <a:t>$1,553,922.94  (51.4% achieved)</a:t>
+                        <a:t>$1,553,922.94  (52.2% achieved)</a:t>
                       </a:r>
                     </a:p>
                   </a:txBody>
@@ -3653,7 +3653,7 @@
                         <a:rPr sz="900">
                           <a:latin typeface="Segoe UI"/>
                         </a:rPr>
-                        <a:t>Fleet Subs: 24  |  Binds: 14</a:t>
+                        <a:t>Fleet Subs: 23  |  Binds: 13</a:t>
                       </a:r>
                     </a:p>
                   </a:txBody>
@@ -3690,7 +3690,7 @@
                         <a:rPr sz="900">
                           <a:latin typeface="Segoe UI"/>
                         </a:rPr>
-                        <a:t>Fleet Bound Premium: $413,685.61</a:t>
+                        <a:t>Fleet Bound Premium: $347,683.32</a:t>
                       </a:r>
                     </a:p>
                   </a:txBody>
@@ -3727,7 +3727,7 @@
                         <a:rPr sz="900">
                           <a:latin typeface="Segoe UI"/>
                         </a:rPr>
-                        <a:t>Fleet Book %: 51.8%</a:t>
+                        <a:t>Fleet Book %: 42.9%</a:t>
                       </a:r>
                     </a:p>
                   </a:txBody>
@@ -3766,7 +3766,7 @@
                         <a:rPr sz="900">
                           <a:latin typeface="Segoe UI"/>
                         </a:rPr>
-                        <a:t>Non-Fleet Subs: 129  |  Binds: 28</a:t>
+                        <a:t>Non-Fleet Subs: 130  |  Binds: 30</a:t>
                       </a:r>
                     </a:p>
                   </a:txBody>
@@ -3803,7 +3803,7 @@
                         <a:rPr sz="900">
                           <a:latin typeface="Segoe UI"/>
                         </a:rPr>
-                        <a:t>Non-Fleet Bound Premium: $385,024.22</a:t>
+                        <a:t>Non-Fleet Bound Premium: $462,801.66</a:t>
                       </a:r>
                     </a:p>
                   </a:txBody>
@@ -3840,7 +3840,7 @@
                         <a:rPr sz="900">
                           <a:latin typeface="Segoe UI"/>
                         </a:rPr>
-                        <a:t>Non-Fleet Book %: 48.2%</a:t>
+                        <a:t>Non-Fleet Book %: 57.1%</a:t>
                       </a:r>
                     </a:p>
                   </a:txBody>
@@ -4428,7 +4428,7 @@
                           </a:solidFill>
                           <a:latin typeface="Segoe UI"/>
                         </a:rPr>
-                        <a:t>35</a:t>
+                        <a:t>36</a:t>
                       </a:r>
                     </a:p>
                   </a:txBody>
@@ -4707,7 +4707,7 @@
                           </a:solidFill>
                           <a:latin typeface="Segoe UI"/>
                         </a:rPr>
-                        <a:t>22.9%</a:t>
+                        <a:t>22.2%</a:t>
                       </a:r>
                     </a:p>
                   </a:txBody>
@@ -5262,7 +5262,7 @@
                           </a:solidFill>
                           <a:latin typeface="Segoe UI"/>
                         </a:rPr>
-                        <a:t>$77.0K</a:t>
+                        <a:t>$88.8K</a:t>
                       </a:r>
                     </a:p>
                   </a:txBody>

--- a/generated/Tier 1 Broker Scorecards/Insure Me Now Agency, LLC_Broker_Scorecard.pptx
+++ b/generated/Tier 1 Broker Scorecards/Insure Me Now Agency, LLC_Broker_Scorecard.pptx
@@ -3357,7 +3357,7 @@
                         <a:rPr sz="800">
                           <a:latin typeface="Segoe UI"/>
                         </a:rPr>
-                        <a:t>$1,109,944.96 / $1,820,183.36 / $810,484.98</a:t>
+                        <a:t>$1,109,944.96 / $1,821,046.78 / $811,348.40</a:t>
                       </a:r>
                     </a:p>
                   </a:txBody>
@@ -3394,7 +3394,7 @@
                         <a:rPr sz="900">
                           <a:latin typeface="Segoe UI"/>
                         </a:rPr>
-                        <a:t>Tier 1  |  28.10% / 15.00%</a:t>
+                        <a:t>Tier 1  |  27.74% / 15.00%</a:t>
                       </a:r>
                     </a:p>
                   </a:txBody>
@@ -3653,7 +3653,7 @@
                         <a:rPr sz="900">
                           <a:latin typeface="Segoe UI"/>
                         </a:rPr>
-                        <a:t>Fleet Subs: 23  |  Binds: 13</a:t>
+                        <a:t>Fleet Subs: 22  |  Binds: 12</a:t>
                       </a:r>
                     </a:p>
                   </a:txBody>
@@ -3690,7 +3690,7 @@
                         <a:rPr sz="900">
                           <a:latin typeface="Segoe UI"/>
                         </a:rPr>
-                        <a:t>Fleet Bound Premium: $347,683.32</a:t>
+                        <a:t>Fleet Bound Premium: $345,568.62</a:t>
                       </a:r>
                     </a:p>
                   </a:txBody>
@@ -3727,7 +3727,7 @@
                         <a:rPr sz="900">
                           <a:latin typeface="Segoe UI"/>
                         </a:rPr>
-                        <a:t>Fleet Book %: 42.9%</a:t>
+                        <a:t>Fleet Book %: 42.6%</a:t>
                       </a:r>
                     </a:p>
                   </a:txBody>
@@ -3766,7 +3766,7 @@
                         <a:rPr sz="900">
                           <a:latin typeface="Segoe UI"/>
                         </a:rPr>
-                        <a:t>Non-Fleet Subs: 130  |  Binds: 30</a:t>
+                        <a:t>Non-Fleet Subs: 133  |  Binds: 31</a:t>
                       </a:r>
                     </a:p>
                   </a:txBody>
@@ -3803,7 +3803,7 @@
                         <a:rPr sz="900">
                           <a:latin typeface="Segoe UI"/>
                         </a:rPr>
-                        <a:t>Non-Fleet Bound Premium: $462,801.66</a:t>
+                        <a:t>Non-Fleet Bound Premium: $465,779.78</a:t>
                       </a:r>
                     </a:p>
                   </a:txBody>
@@ -3840,7 +3840,7 @@
                         <a:rPr sz="900">
                           <a:latin typeface="Segoe UI"/>
                         </a:rPr>
-                        <a:t>Non-Fleet Book %: 57.1%</a:t>
+                        <a:t>Non-Fleet Book %: 57.4%</a:t>
                       </a:r>
                     </a:p>
                   </a:txBody>
@@ -4428,7 +4428,7 @@
                           </a:solidFill>
                           <a:latin typeface="Segoe UI"/>
                         </a:rPr>
-                        <a:t>36</a:t>
+                        <a:t>39</a:t>
                       </a:r>
                     </a:p>
                   </a:txBody>
@@ -4707,7 +4707,7 @@
                           </a:solidFill>
                           <a:latin typeface="Segoe UI"/>
                         </a:rPr>
-                        <a:t>22.2%</a:t>
+                        <a:t>23.1%</a:t>
                       </a:r>
                     </a:p>
                   </a:txBody>
@@ -4983,7 +4983,7 @@
                           </a:solidFill>
                           <a:latin typeface="Segoe UI"/>
                         </a:rPr>
-                        <a:t>8</a:t>
+                        <a:t>9</a:t>
                       </a:r>
                     </a:p>
                   </a:txBody>
@@ -5262,7 +5262,7 @@
                           </a:solidFill>
                           <a:latin typeface="Segoe UI"/>
                         </a:rPr>
-                        <a:t>$88.8K</a:t>
+                        <a:t>$89.7K</a:t>
                       </a:r>
                     </a:p>
                   </a:txBody>

--- a/generated/Tier 1 Broker Scorecards/Insure Me Now Agency, LLC_Broker_Scorecard.pptx
+++ b/generated/Tier 1 Broker Scorecards/Insure Me Now Agency, LLC_Broker_Scorecard.pptx
@@ -3690,7 +3690,7 @@
                         <a:rPr sz="900">
                           <a:latin typeface="Segoe UI"/>
                         </a:rPr>
-                        <a:t>Fleet Bound Premium: $345,568.62</a:t>
+                        <a:t>Fleet Bound Premium: $346,630.18</a:t>
                       </a:r>
                     </a:p>
                   </a:txBody>
@@ -3727,7 +3727,7 @@
                         <a:rPr sz="900">
                           <a:latin typeface="Segoe UI"/>
                         </a:rPr>
-                        <a:t>Fleet Book %: 42.6%</a:t>
+                        <a:t>Fleet Book %: 42.7%</a:t>
                       </a:r>
                     </a:p>
                   </a:txBody>
@@ -3803,7 +3803,7 @@
                         <a:rPr sz="900">
                           <a:latin typeface="Segoe UI"/>
                         </a:rPr>
-                        <a:t>Non-Fleet Bound Premium: $465,779.78</a:t>
+                        <a:t>Non-Fleet Bound Premium: $464,718.22</a:t>
                       </a:r>
                     </a:p>
                   </a:txBody>
@@ -3840,7 +3840,7 @@
                         <a:rPr sz="900">
                           <a:latin typeface="Segoe UI"/>
                         </a:rPr>
-                        <a:t>Non-Fleet Book %: 57.4%</a:t>
+                        <a:t>Non-Fleet Book %: 57.3%</a:t>
                       </a:r>
                     </a:p>
                   </a:txBody>

--- a/generated/Tier 1 Broker Scorecards/Insure Me Now Agency, LLC_Broker_Scorecard.pptx
+++ b/generated/Tier 1 Broker Scorecards/Insure Me Now Agency, LLC_Broker_Scorecard.pptx
@@ -3394,7 +3394,7 @@
                         <a:rPr sz="900">
                           <a:latin typeface="Segoe UI"/>
                         </a:rPr>
-                        <a:t>Tier 1  |  27.74% / 15.00%</a:t>
+                        <a:t>Tier 1  |  27.39% / 15.00%</a:t>
                       </a:r>
                     </a:p>
                   </a:txBody>
@@ -3653,7 +3653,7 @@
                         <a:rPr sz="900">
                           <a:latin typeface="Segoe UI"/>
                         </a:rPr>
-                        <a:t>Fleet Subs: 22  |  Binds: 12</a:t>
+                        <a:t>Fleet Subs: 23  |  Binds: 12</a:t>
                       </a:r>
                     </a:p>
                   </a:txBody>
@@ -3690,7 +3690,7 @@
                         <a:rPr sz="900">
                           <a:latin typeface="Segoe UI"/>
                         </a:rPr>
-                        <a:t>Fleet Bound Premium: $346,630.18</a:t>
+                        <a:t>Fleet Bound Premium: $345,568.62</a:t>
                       </a:r>
                     </a:p>
                   </a:txBody>
@@ -3727,7 +3727,7 @@
                         <a:rPr sz="900">
                           <a:latin typeface="Segoe UI"/>
                         </a:rPr>
-                        <a:t>Fleet Book %: 42.7%</a:t>
+                        <a:t>Fleet Book %: 42.6%</a:t>
                       </a:r>
                     </a:p>
                   </a:txBody>
@@ -3766,7 +3766,7 @@
                         <a:rPr sz="900">
                           <a:latin typeface="Segoe UI"/>
                         </a:rPr>
-                        <a:t>Non-Fleet Subs: 133  |  Binds: 31</a:t>
+                        <a:t>Non-Fleet Subs: 134  |  Binds: 31</a:t>
                       </a:r>
                     </a:p>
                   </a:txBody>
@@ -3803,7 +3803,7 @@
                         <a:rPr sz="900">
                           <a:latin typeface="Segoe UI"/>
                         </a:rPr>
-                        <a:t>Non-Fleet Bound Premium: $464,718.22</a:t>
+                        <a:t>Non-Fleet Bound Premium: $465,779.78</a:t>
                       </a:r>
                     </a:p>
                   </a:txBody>
@@ -3840,7 +3840,7 @@
                         <a:rPr sz="900">
                           <a:latin typeface="Segoe UI"/>
                         </a:rPr>
-                        <a:t>Non-Fleet Book %: 57.3%</a:t>
+                        <a:t>Non-Fleet Book %: 57.4%</a:t>
                       </a:r>
                     </a:p>
                   </a:txBody>
@@ -4428,7 +4428,7 @@
                           </a:solidFill>
                           <a:latin typeface="Segoe UI"/>
                         </a:rPr>
-                        <a:t>39</a:t>
+                        <a:t>41</a:t>
                       </a:r>
                     </a:p>
                   </a:txBody>
@@ -4707,7 +4707,7 @@
                           </a:solidFill>
                           <a:latin typeface="Segoe UI"/>
                         </a:rPr>
-                        <a:t>23.1%</a:t>
+                        <a:t>22.0%</a:t>
                       </a:r>
                     </a:p>
                   </a:txBody>

--- a/generated/Tier 1 Broker Scorecards/Insure Me Now Agency, LLC_Broker_Scorecard.pptx
+++ b/generated/Tier 1 Broker Scorecards/Insure Me Now Agency, LLC_Broker_Scorecard.pptx
@@ -3357,7 +3357,7 @@
                         <a:rPr sz="800">
                           <a:latin typeface="Segoe UI"/>
                         </a:rPr>
-                        <a:t>$1,109,944.96 / $1,821,046.78 / $811,348.40</a:t>
+                        <a:t>$1,109,944.96 / $1,821,944.86 / $812,246.48</a:t>
                       </a:r>
                     </a:p>
                   </a:txBody>
@@ -3394,7 +3394,7 @@
                         <a:rPr sz="900">
                           <a:latin typeface="Segoe UI"/>
                         </a:rPr>
-                        <a:t>Tier 1  |  27.39% / 15.00%</a:t>
+                        <a:t>Tier 1  |  26.75% / 15.00%</a:t>
                       </a:r>
                     </a:p>
                   </a:txBody>
@@ -3431,7 +3431,7 @@
                         <a:rPr sz="900">
                           <a:latin typeface="Segoe UI"/>
                         </a:rPr>
-                        <a:t>$1,553,922.94  (52.2% achieved)</a:t>
+                        <a:t>$1,553,922.94  (52.3% achieved)</a:t>
                       </a:r>
                     </a:p>
                   </a:txBody>
@@ -3653,7 +3653,7 @@
                         <a:rPr sz="900">
                           <a:latin typeface="Segoe UI"/>
                         </a:rPr>
-                        <a:t>Fleet Subs: 23  |  Binds: 12</a:t>
+                        <a:t>Fleet Subs: 25  |  Binds: 13</a:t>
                       </a:r>
                     </a:p>
                   </a:txBody>
@@ -3690,7 +3690,7 @@
                         <a:rPr sz="900">
                           <a:latin typeface="Segoe UI"/>
                         </a:rPr>
-                        <a:t>Fleet Bound Premium: $346,630.18</a:t>
+                        <a:t>Fleet Bound Premium: $365,067.39</a:t>
                       </a:r>
                     </a:p>
                   </a:txBody>
@@ -3727,7 +3727,7 @@
                         <a:rPr sz="900">
                           <a:latin typeface="Segoe UI"/>
                         </a:rPr>
-                        <a:t>Fleet Book %: 42.7%</a:t>
+                        <a:t>Fleet Book %: 44.9%</a:t>
                       </a:r>
                     </a:p>
                   </a:txBody>
@@ -3766,7 +3766,7 @@
                         <a:rPr sz="900">
                           <a:latin typeface="Segoe UI"/>
                         </a:rPr>
-                        <a:t>Non-Fleet Subs: 134  |  Binds: 31</a:t>
+                        <a:t>Non-Fleet Subs: 132  |  Binds: 29</a:t>
                       </a:r>
                     </a:p>
                   </a:txBody>
@@ -3803,7 +3803,7 @@
                         <a:rPr sz="900">
                           <a:latin typeface="Segoe UI"/>
                         </a:rPr>
-                        <a:t>Non-Fleet Bound Premium: $464,718.22</a:t>
+                        <a:t>Non-Fleet Bound Premium: $447,179.09</a:t>
                       </a:r>
                     </a:p>
                   </a:txBody>
@@ -3840,7 +3840,7 @@
                         <a:rPr sz="900">
                           <a:latin typeface="Segoe UI"/>
                         </a:rPr>
-                        <a:t>Non-Fleet Book %: 57.3%</a:t>
+                        <a:t>Non-Fleet Book %: 55.1%</a:t>
                       </a:r>
                     </a:p>
                   </a:txBody>
@@ -4707,7 +4707,7 @@
                           </a:solidFill>
                           <a:latin typeface="Segoe UI"/>
                         </a:rPr>
-                        <a:t>22.0%</a:t>
+                        <a:t>19.5%</a:t>
                       </a:r>
                     </a:p>
                   </a:txBody>
@@ -4983,7 +4983,7 @@
                           </a:solidFill>
                           <a:latin typeface="Segoe UI"/>
                         </a:rPr>
-                        <a:t>9</a:t>
+                        <a:t>8</a:t>
                       </a:r>
                     </a:p>
                   </a:txBody>
@@ -5262,7 +5262,7 @@
                           </a:solidFill>
                           <a:latin typeface="Segoe UI"/>
                         </a:rPr>
-                        <a:t>$89.7K</a:t>
+                        <a:t>$90.6K</a:t>
                       </a:r>
                     </a:p>
                   </a:txBody>

--- a/generated/Tier 1 Broker Scorecards/Insure Me Now Agency, LLC_Broker_Scorecard.pptx
+++ b/generated/Tier 1 Broker Scorecards/Insure Me Now Agency, LLC_Broker_Scorecard.pptx
@@ -3357,7 +3357,7 @@
                         <a:rPr sz="800">
                           <a:latin typeface="Segoe UI"/>
                         </a:rPr>
-                        <a:t>$1,109,944.96 / $1,821,944.86 / $812,246.48</a:t>
+                        <a:t>$1,109,944.96 / $1,845,786.69 / $836,088.31</a:t>
                       </a:r>
                     </a:p>
                   </a:txBody>
@@ -3394,7 +3394,7 @@
                         <a:rPr sz="900">
                           <a:latin typeface="Segoe UI"/>
                         </a:rPr>
-                        <a:t>Tier 1  |  26.75% / 15.00%</a:t>
+                        <a:t>Tier 1  |  27.39% / 15.00%</a:t>
                       </a:r>
                     </a:p>
                   </a:txBody>
@@ -3431,7 +3431,7 @@
                         <a:rPr sz="900">
                           <a:latin typeface="Segoe UI"/>
                         </a:rPr>
-                        <a:t>$1,553,922.94  (52.3% achieved)</a:t>
+                        <a:t>$1,553,922.94  (53.8% achieved)</a:t>
                       </a:r>
                     </a:p>
                   </a:txBody>
@@ -3653,7 +3653,7 @@
                         <a:rPr sz="900">
                           <a:latin typeface="Segoe UI"/>
                         </a:rPr>
-                        <a:t>Fleet Subs: 25  |  Binds: 13</a:t>
+                        <a:t>Fleet Subs: 24  |  Binds: 13</a:t>
                       </a:r>
                     </a:p>
                   </a:txBody>
@@ -3690,7 +3690,7 @@
                         <a:rPr sz="900">
                           <a:latin typeface="Segoe UI"/>
                         </a:rPr>
-                        <a:t>Fleet Bound Premium: $365,067.39</a:t>
+                        <a:t>Fleet Bound Premium: $361,122.53</a:t>
                       </a:r>
                     </a:p>
                   </a:txBody>
@@ -3727,7 +3727,7 @@
                         <a:rPr sz="900">
                           <a:latin typeface="Segoe UI"/>
                         </a:rPr>
-                        <a:t>Fleet Book %: 44.9%</a:t>
+                        <a:t>Fleet Book %: 43.2%</a:t>
                       </a:r>
                     </a:p>
                   </a:txBody>
@@ -3766,7 +3766,7 @@
                         <a:rPr sz="900">
                           <a:latin typeface="Segoe UI"/>
                         </a:rPr>
-                        <a:t>Non-Fleet Subs: 132  |  Binds: 29</a:t>
+                        <a:t>Non-Fleet Subs: 133  |  Binds: 30</a:t>
                       </a:r>
                     </a:p>
                   </a:txBody>
@@ -3803,7 +3803,7 @@
                         <a:rPr sz="900">
                           <a:latin typeface="Segoe UI"/>
                         </a:rPr>
-                        <a:t>Non-Fleet Bound Premium: $447,179.09</a:t>
+                        <a:t>Non-Fleet Bound Premium: $474,965.78</a:t>
                       </a:r>
                     </a:p>
                   </a:txBody>
@@ -3840,7 +3840,7 @@
                         <a:rPr sz="900">
                           <a:latin typeface="Segoe UI"/>
                         </a:rPr>
-                        <a:t>Non-Fleet Book %: 55.1%</a:t>
+                        <a:t>Non-Fleet Book %: 56.8%</a:t>
                       </a:r>
                     </a:p>
                   </a:txBody>
@@ -4707,7 +4707,7 @@
                           </a:solidFill>
                           <a:latin typeface="Segoe UI"/>
                         </a:rPr>
-                        <a:t>19.5%</a:t>
+                        <a:t>22.0%</a:t>
                       </a:r>
                     </a:p>
                   </a:txBody>
@@ -4983,7 +4983,7 @@
                           </a:solidFill>
                           <a:latin typeface="Segoe UI"/>
                         </a:rPr>
-                        <a:t>8</a:t>
+                        <a:t>9</a:t>
                       </a:r>
                     </a:p>
                   </a:txBody>
@@ -5258,11 +5258,11 @@
                       <a:r>
                         <a:rPr sz="800" b="1">
                           <a:solidFill>
-                            <a:srgbClr val="DC2626"/>
+                            <a:srgbClr val="059669"/>
                           </a:solidFill>
                           <a:latin typeface="Segoe UI"/>
                         </a:rPr>
-                        <a:t>$90.6K</a:t>
+                        <a:t>$114.4K</a:t>
                       </a:r>
                     </a:p>
                   </a:txBody>

--- a/generated/Tier 1 Broker Scorecards/Insure Me Now Agency, LLC_Broker_Scorecard.pptx
+++ b/generated/Tier 1 Broker Scorecards/Insure Me Now Agency, LLC_Broker_Scorecard.pptx
@@ -3394,7 +3394,7 @@
                         <a:rPr sz="900">
                           <a:latin typeface="Segoe UI"/>
                         </a:rPr>
-                        <a:t>Tier 1  |  27.39% / 15.00%</a:t>
+                        <a:t>Tier 1  |  27.22% / 15.00%</a:t>
                       </a:r>
                     </a:p>
                   </a:txBody>
@@ -3766,7 +3766,7 @@
                         <a:rPr sz="900">
                           <a:latin typeface="Segoe UI"/>
                         </a:rPr>
-                        <a:t>Non-Fleet Subs: 133  |  Binds: 30</a:t>
+                        <a:t>Non-Fleet Subs: 134  |  Binds: 30</a:t>
                       </a:r>
                     </a:p>
                   </a:txBody>
@@ -4428,7 +4428,7 @@
                           </a:solidFill>
                           <a:latin typeface="Segoe UI"/>
                         </a:rPr>
-                        <a:t>41</a:t>
+                        <a:t>42</a:t>
                       </a:r>
                     </a:p>
                   </a:txBody>
@@ -4624,7 +4624,7 @@
                           </a:solidFill>
                           <a:latin typeface="Segoe UI"/>
                         </a:rPr>
-                        <a:t>32.1%</a:t>
+                        <a:t>33.9%</a:t>
                       </a:r>
                     </a:p>
                   </a:txBody>
@@ -4707,7 +4707,7 @@
                           </a:solidFill>
                           <a:latin typeface="Segoe UI"/>
                         </a:rPr>
-                        <a:t>22.0%</a:t>
+                        <a:t>21.4%</a:t>
                       </a:r>
                     </a:p>
                   </a:txBody>
@@ -4906,7 +4906,7 @@
                           </a:solidFill>
                           <a:latin typeface="Segoe UI"/>
                         </a:rPr>
-                        <a:t>18</a:t>
+                        <a:t>19</a:t>
                       </a:r>
                     </a:p>
                   </a:txBody>

--- a/generated/Tier 1 Broker Scorecards/Insure Me Now Agency, LLC_Broker_Scorecard.pptx
+++ b/generated/Tier 1 Broker Scorecards/Insure Me Now Agency, LLC_Broker_Scorecard.pptx
@@ -3357,7 +3357,7 @@
                         <a:rPr sz="800">
                           <a:latin typeface="Segoe UI"/>
                         </a:rPr>
-                        <a:t>$1,109,944.96 / $1,845,786.69 / $836,088.31</a:t>
+                        <a:t>$1,109,944.96 / $1,868,473.51 / $858,775.13</a:t>
                       </a:r>
                     </a:p>
                   </a:txBody>
@@ -3394,7 +3394,7 @@
                         <a:rPr sz="900">
                           <a:latin typeface="Segoe UI"/>
                         </a:rPr>
-                        <a:t>Tier 1  |  27.22% / 15.00%</a:t>
+                        <a:t>Tier 1  |  26.88% / 15.00%</a:t>
                       </a:r>
                     </a:p>
                   </a:txBody>
@@ -3431,7 +3431,7 @@
                         <a:rPr sz="900">
                           <a:latin typeface="Segoe UI"/>
                         </a:rPr>
-                        <a:t>$1,553,922.94  (53.8% achieved)</a:t>
+                        <a:t>$1,553,922.94  (55.3% achieved)</a:t>
                       </a:r>
                     </a:p>
                   </a:txBody>
@@ -3653,7 +3653,7 @@
                         <a:rPr sz="900">
                           <a:latin typeface="Segoe UI"/>
                         </a:rPr>
-                        <a:t>Fleet Subs: 24  |  Binds: 13</a:t>
+                        <a:t>Fleet Subs: 26  |  Binds: 14</a:t>
                       </a:r>
                     </a:p>
                   </a:txBody>
@@ -3690,7 +3690,7 @@
                         <a:rPr sz="900">
                           <a:latin typeface="Segoe UI"/>
                         </a:rPr>
-                        <a:t>Fleet Bound Premium: $361,122.53</a:t>
+                        <a:t>Fleet Bound Premium: $461,311.95</a:t>
                       </a:r>
                     </a:p>
                   </a:txBody>
@@ -3727,7 +3727,7 @@
                         <a:rPr sz="900">
                           <a:latin typeface="Segoe UI"/>
                         </a:rPr>
-                        <a:t>Fleet Book %: 43.2%</a:t>
+                        <a:t>Fleet Book %: 53.7%</a:t>
                       </a:r>
                     </a:p>
                   </a:txBody>
@@ -3766,7 +3766,7 @@
                         <a:rPr sz="900">
                           <a:latin typeface="Segoe UI"/>
                         </a:rPr>
-                        <a:t>Non-Fleet Subs: 134  |  Binds: 30</a:t>
+                        <a:t>Non-Fleet Subs: 134  |  Binds: 29</a:t>
                       </a:r>
                     </a:p>
                   </a:txBody>
@@ -3803,7 +3803,7 @@
                         <a:rPr sz="900">
                           <a:latin typeface="Segoe UI"/>
                         </a:rPr>
-                        <a:t>Non-Fleet Bound Premium: $474,965.78</a:t>
+                        <a:t>Non-Fleet Bound Premium: $397,463.18</a:t>
                       </a:r>
                     </a:p>
                   </a:txBody>
@@ -3840,7 +3840,7 @@
                         <a:rPr sz="900">
                           <a:latin typeface="Segoe UI"/>
                         </a:rPr>
-                        <a:t>Non-Fleet Book %: 56.8%</a:t>
+                        <a:t>Non-Fleet Book %: 46.3%</a:t>
                       </a:r>
                     </a:p>
                   </a:txBody>
@@ -4428,7 +4428,7 @@
                           </a:solidFill>
                           <a:latin typeface="Segoe UI"/>
                         </a:rPr>
-                        <a:t>42</a:t>
+                        <a:t>44</a:t>
                       </a:r>
                     </a:p>
                   </a:txBody>
@@ -4707,7 +4707,7 @@
                           </a:solidFill>
                           <a:latin typeface="Segoe UI"/>
                         </a:rPr>
-                        <a:t>21.4%</a:t>
+                        <a:t>20.5%</a:t>
                       </a:r>
                     </a:p>
                   </a:txBody>
@@ -5262,7 +5262,7 @@
                           </a:solidFill>
                           <a:latin typeface="Segoe UI"/>
                         </a:rPr>
-                        <a:t>$114.4K</a:t>
+                        <a:t>$137.1K</a:t>
                       </a:r>
                     </a:p>
                   </a:txBody>

--- a/generated/Tier 1 Broker Scorecards/Insure Me Now Agency, LLC_Broker_Scorecard.pptx
+++ b/generated/Tier 1 Broker Scorecards/Insure Me Now Agency, LLC_Broker_Scorecard.pptx
@@ -3690,7 +3690,7 @@
                         <a:rPr sz="900">
                           <a:latin typeface="Segoe UI"/>
                         </a:rPr>
-                        <a:t>Fleet Bound Premium: $461,311.95</a:t>
+                        <a:t>Fleet Bound Premium: $462,098.73</a:t>
                       </a:r>
                     </a:p>
                   </a:txBody>
@@ -3727,7 +3727,7 @@
                         <a:rPr sz="900">
                           <a:latin typeface="Segoe UI"/>
                         </a:rPr>
-                        <a:t>Fleet Book %: 53.7%</a:t>
+                        <a:t>Fleet Book %: 53.8%</a:t>
                       </a:r>
                     </a:p>
                   </a:txBody>
@@ -3803,7 +3803,7 @@
                         <a:rPr sz="900">
                           <a:latin typeface="Segoe UI"/>
                         </a:rPr>
-                        <a:t>Non-Fleet Bound Premium: $397,463.18</a:t>
+                        <a:t>Non-Fleet Bound Premium: $396,676.40</a:t>
                       </a:r>
                     </a:p>
                   </a:txBody>
@@ -3840,7 +3840,7 @@
                         <a:rPr sz="900">
                           <a:latin typeface="Segoe UI"/>
                         </a:rPr>
-                        <a:t>Non-Fleet Book %: 46.3%</a:t>
+                        <a:t>Non-Fleet Book %: 46.2%</a:t>
                       </a:r>
                     </a:p>
                   </a:txBody>
@@ -4428,7 +4428,7 @@
                           </a:solidFill>
                           <a:latin typeface="Segoe UI"/>
                         </a:rPr>
-                        <a:t>44</a:t>
+                        <a:t>45</a:t>
                       </a:r>
                     </a:p>
                   </a:txBody>
@@ -4707,7 +4707,7 @@
                           </a:solidFill>
                           <a:latin typeface="Segoe UI"/>
                         </a:rPr>
-                        <a:t>20.5%</a:t>
+                        <a:t>22.2%</a:t>
                       </a:r>
                     </a:p>
                   </a:txBody>
@@ -4983,7 +4983,7 @@
                           </a:solidFill>
                           <a:latin typeface="Segoe UI"/>
                         </a:rPr>
-                        <a:t>9</a:t>
+                        <a:t>10</a:t>
                       </a:r>
                     </a:p>
                   </a:txBody>

--- a/generated/Tier 1 Broker Scorecards/Insure Me Now Agency, LLC_Broker_Scorecard.pptx
+++ b/generated/Tier 1 Broker Scorecards/Insure Me Now Agency, LLC_Broker_Scorecard.pptx
@@ -3357,7 +3357,7 @@
                         <a:rPr sz="800">
                           <a:latin typeface="Segoe UI"/>
                         </a:rPr>
-                        <a:t>$1,109,944.96 / $1,868,473.51 / $858,775.13</a:t>
+                        <a:t>$1,109,944.96 / $1,764,652.37 / $858,775.13</a:t>
                       </a:r>
                     </a:p>
                   </a:txBody>
